--- a/system-design-101/vi/lessons/sd-07-014/slides/sd-07-014.pptx
+++ b/system-design-101/vi/lessons/sd-07-014/slides/sd-07-014.pptx
@@ -5857,6 +5857,39 @@
               <a:buNone/>
             </a:pPr>
             <a:r>
+              <a:rPr lang="en-US" sz="2100" b="1" dirty="0" spc="-7" kern="0">
+                <a:solidFill>
+                  <a:srgbClr val="F3EEE3"/>
+                </a:solidFill>
+                <a:latin typeface="Be Vietnam Pro" pitchFamily="34" charset="0"/>
+                <a:ea typeface="Be Vietnam Pro" pitchFamily="34" charset="-122"/>
+                <a:cs typeface="Be Vietnam Pro" pitchFamily="34" charset="-120"/>
+              </a:rPr>
+              <a:t>Theo</a:t>
+            </a:r>
+            <a:r>
+              <a:rPr lang="en-US" sz="2100" b="1" dirty="0" spc="-4" kern="0">
+                <a:solidFill>
+                  <a:srgbClr val="F3EEE3"/>
+                </a:solidFill>
+                <a:latin typeface="Be Vietnam Pro" pitchFamily="34" charset="0"/>
+                <a:ea typeface="Be Vietnam Pro" pitchFamily="34" charset="-122"/>
+                <a:cs typeface="Be Vietnam Pro" pitchFamily="34" charset="-120"/>
+              </a:rPr>
+              <a:t> nguồn,</a:t>
+            </a:r>
+            <a:r>
+              <a:rPr lang="en-US" sz="2100" b="1" dirty="0" spc="-5" kern="0">
+                <a:solidFill>
+                  <a:srgbClr val="F3EEE3"/>
+                </a:solidFill>
+                <a:latin typeface="Be Vietnam Pro" pitchFamily="34" charset="0"/>
+                <a:ea typeface="Be Vietnam Pro" pitchFamily="34" charset="-122"/>
+                <a:cs typeface="Be Vietnam Pro" pitchFamily="34" charset="-120"/>
+              </a:rPr>
+              <a:t> bộ</a:t>
+            </a:r>
+            <a:r>
               <a:rPr lang="en-US" sz="2100" b="1" dirty="0" spc="-2" kern="0">
                 <a:solidFill>
                   <a:srgbClr val="F3EEE3"/>
@@ -5865,21 +5898,10 @@
                 <a:ea typeface="Be Vietnam Pro" pitchFamily="34" charset="-122"/>
                 <a:cs typeface="Be Vietnam Pro" pitchFamily="34" charset="-120"/>
               </a:rPr>
-              <a:t>Bộ</a:t>
-            </a:r>
-            <a:r>
-              <a:rPr lang="en-US" sz="2100" b="1" dirty="0" spc="-1" kern="0">
-                <a:solidFill>
-                  <a:srgbClr val="F3EEE3"/>
-                </a:solidFill>
-                <a:latin typeface="Be Vietnam Pro" pitchFamily="34" charset="0"/>
-                <a:ea typeface="Be Vietnam Pro" pitchFamily="34" charset="-122"/>
-                <a:cs typeface="Be Vietnam Pro" pitchFamily="34" charset="-120"/>
-              </a:rPr>
               <a:t> xử</a:t>
             </a:r>
             <a:r>
-              <a:rPr lang="en-US" sz="2100" b="1" dirty="0" spc="1" kern="0">
+              <a:rPr lang="en-US" sz="2100" b="1" dirty="0" spc="2" kern="0">
                 <a:solidFill>
                   <a:srgbClr val="F3EEE3"/>
                 </a:solidFill>
@@ -5912,6 +5934,72 @@
               <a:t> thu giữ</a:t>
             </a:r>
             <a:r>
+              <a:rPr lang="en-US" sz="2100" b="1" dirty="0" spc="-5" kern="0">
+                <a:solidFill>
+                  <a:srgbClr val="F3EEE3"/>
+                </a:solidFill>
+                <a:latin typeface="Be Vietnam Pro" pitchFamily="34" charset="0"/>
+                <a:ea typeface="Be Vietnam Pro" pitchFamily="34" charset="-122"/>
+                <a:cs typeface="Be Vietnam Pro" pitchFamily="34" charset="-120"/>
+              </a:rPr>
+              <a:t> tài</a:t>
+            </a:r>
+            <a:r>
+              <a:rPr lang="en-US" sz="2100" b="1" dirty="0" spc="-3" kern="0">
+                <a:solidFill>
+                  <a:srgbClr val="F3EEE3"/>
+                </a:solidFill>
+                <a:latin typeface="Be Vietnam Pro" pitchFamily="34" charset="0"/>
+                <a:ea typeface="Be Vietnam Pro" pitchFamily="34" charset="-122"/>
+                <a:cs typeface="Be Vietnam Pro" pitchFamily="34" charset="-120"/>
+              </a:rPr>
+              <a:t> khoản</a:t>
+            </a:r>
+            <a:r>
+              <a:rPr lang="en-US" sz="2100" b="1" dirty="0" spc="7" kern="0">
+                <a:solidFill>
+                  <a:srgbClr val="F3EEE3"/>
+                </a:solidFill>
+                <a:latin typeface="Be Vietnam Pro" pitchFamily="34" charset="0"/>
+                <a:ea typeface="Be Vietnam Pro" pitchFamily="34" charset="-122"/>
+                <a:cs typeface="Be Vietnam Pro" pitchFamily="34" charset="-120"/>
+              </a:rPr>
+              <a:t> người</a:t>
+            </a:r>
+            <a:r>
+              <a:rPr lang="en-US" sz="2100" b="1" dirty="0" spc="2" kern="0">
+                <a:solidFill>
+                  <a:srgbClr val="F3EEE3"/>
+                </a:solidFill>
+                <a:latin typeface="Be Vietnam Pro" pitchFamily="34" charset="0"/>
+                <a:ea typeface="Be Vietnam Pro" pitchFamily="34" charset="-122"/>
+                <a:cs typeface="Be Vietnam Pro" pitchFamily="34" charset="-120"/>
+              </a:rPr>
+              <a:t> bán</a:t>
+            </a:r>
+            <a:r>
+              <a:rPr lang="en-US" sz="2100" b="1" dirty="0" spc="-3" kern="0">
+                <a:solidFill>
+                  <a:srgbClr val="F3EEE3"/>
+                </a:solidFill>
+                <a:latin typeface="Be Vietnam Pro" pitchFamily="34" charset="0"/>
+                <a:ea typeface="Be Vietnam Pro" pitchFamily="34" charset="-122"/>
+                <a:cs typeface="Be Vietnam Pro" pitchFamily="34" charset="-120"/>
+              </a:rPr>
+              <a:t> khi</a:t>
+            </a:r>
+            <a:r>
+              <a:rPr lang="en-US" sz="2100" b="1" dirty="0" spc="-16" kern="0">
+                <a:solidFill>
+                  <a:srgbClr val="F3EEE3"/>
+                </a:solidFill>
+                <a:latin typeface="Be Vietnam Pro" pitchFamily="34" charset="0"/>
+                <a:ea typeface="Be Vietnam Pro" pitchFamily="34" charset="-122"/>
+                <a:cs typeface="Be Vietnam Pro" pitchFamily="34" charset="-120"/>
+              </a:rPr>
+              <a:t> quyết</a:t>
+            </a:r>
+            <a:r>
               <a:rPr lang="en-US" sz="2100" b="1" dirty="0" spc="-4" kern="0">
                 <a:solidFill>
                   <a:srgbClr val="F3EEE3"/>
@@ -5920,29 +6008,84 @@
                 <a:ea typeface="Be Vietnam Pro" pitchFamily="34" charset="-122"/>
                 <a:cs typeface="Be Vietnam Pro" pitchFamily="34" charset="-120"/>
               </a:rPr>
-              <a:t> tài khoản</a:t>
-            </a:r>
-            <a:r>
-              <a:rPr lang="en-US" sz="2100" b="1" dirty="0" spc="8" kern="0">
-                <a:solidFill>
-                  <a:srgbClr val="F3EEE3"/>
-                </a:solidFill>
-                <a:latin typeface="Be Vietnam Pro" pitchFamily="34" charset="0"/>
-                <a:ea typeface="Be Vietnam Pro" pitchFamily="34" charset="-122"/>
-                <a:cs typeface="Be Vietnam Pro" pitchFamily="34" charset="-120"/>
-              </a:rPr>
-              <a:t> người</a:t>
-            </a:r>
-            <a:r>
-              <a:rPr lang="en-US" sz="2100" b="1" dirty="0" spc="1" kern="0">
-                <a:solidFill>
-                  <a:srgbClr val="F3EEE3"/>
-                </a:solidFill>
-                <a:latin typeface="Be Vietnam Pro" pitchFamily="34" charset="0"/>
-                <a:ea typeface="Be Vietnam Pro" pitchFamily="34" charset="-122"/>
-                <a:cs typeface="Be Vietnam Pro" pitchFamily="34" charset="-120"/>
-              </a:rPr>
-              <a:t> bán</a:t>
+              <a:t> toán;</a:t>
+            </a:r>
+            <a:r>
+              <a:rPr lang="en-US" sz="2100" b="1" dirty="0" spc="6" kern="0">
+                <a:solidFill>
+                  <a:srgbClr val="F3EEE3"/>
+                </a:solidFill>
+                <a:latin typeface="Be Vietnam Pro" pitchFamily="34" charset="0"/>
+                <a:ea typeface="Be Vietnam Pro" pitchFamily="34" charset="-122"/>
+                <a:cs typeface="Be Vietnam Pro" pitchFamily="34" charset="-120"/>
+              </a:rPr>
+              <a:t> thực</a:t>
+            </a:r>
+            <a:r>
+              <a:rPr lang="en-US" sz="2100" b="1" dirty="0" spc="-9" kern="0">
+                <a:solidFill>
+                  <a:srgbClr val="F3EEE3"/>
+                </a:solidFill>
+                <a:latin typeface="Be Vietnam Pro" pitchFamily="34" charset="0"/>
+                <a:ea typeface="Be Vietnam Pro" pitchFamily="34" charset="-122"/>
+                <a:cs typeface="Be Vietnam Pro" pitchFamily="34" charset="-120"/>
+              </a:rPr>
+              <a:t> tế</a:t>
+            </a:r>
+            <a:r>
+              <a:rPr lang="en-US" sz="2100" b="1" dirty="0" spc="-16" kern="0">
+                <a:solidFill>
+                  <a:srgbClr val="F3EEE3"/>
+                </a:solidFill>
+                <a:latin typeface="Be Vietnam Pro" pitchFamily="34" charset="0"/>
+                <a:ea typeface="Be Vietnam Pro" pitchFamily="34" charset="-122"/>
+                <a:cs typeface="Be Vietnam Pro" pitchFamily="34" charset="-120"/>
+              </a:rPr>
+              <a:t> vai</a:t>
+            </a:r>
+            <a:r>
+              <a:rPr lang="en-US" sz="2100" b="1" dirty="0" spc="-7" kern="0">
+                <a:solidFill>
+                  <a:srgbClr val="F3EEE3"/>
+                </a:solidFill>
+                <a:latin typeface="Be Vietnam Pro" pitchFamily="34" charset="0"/>
+                <a:ea typeface="Be Vietnam Pro" pitchFamily="34" charset="-122"/>
+                <a:cs typeface="Be Vietnam Pro" pitchFamily="34" charset="-120"/>
+              </a:rPr>
+              <a:t> này</a:t>
+            </a:r>
+            <a:r>
+              <a:rPr lang="en-US" sz="2100" b="1" dirty="0" spc="4" kern="0">
+                <a:solidFill>
+                  <a:srgbClr val="F3EEE3"/>
+                </a:solidFill>
+                <a:latin typeface="Be Vietnam Pro" pitchFamily="34" charset="0"/>
+                <a:ea typeface="Be Vietnam Pro" pitchFamily="34" charset="-122"/>
+                <a:cs typeface="Be Vietnam Pro" pitchFamily="34" charset="-120"/>
+              </a:rPr>
+              <a:t> thường</a:t>
+            </a:r>
+            <a:r>
+              <a:rPr lang="en-US" sz="2100" b="1" dirty="0" spc="-6" kern="0">
+                <a:solidFill>
+                  <a:srgbClr val="F3EEE3"/>
+                </a:solidFill>
+                <a:latin typeface="Be Vietnam Pro" pitchFamily="34" charset="0"/>
+                <a:ea typeface="Be Vietnam Pro" pitchFamily="34" charset="-122"/>
+                <a:cs typeface="Be Vietnam Pro" pitchFamily="34" charset="-120"/>
+              </a:rPr>
+              <a:t> thuộc</a:t>
+            </a:r>
+            <a:r>
+              <a:rPr lang="en-US" sz="2100" b="1" dirty="0" spc="-2" kern="0">
+                <a:solidFill>
+                  <a:srgbClr val="F3EEE3"/>
+                </a:solidFill>
+                <a:latin typeface="Be Vietnam Pro" pitchFamily="34" charset="0"/>
+                <a:ea typeface="Be Vietnam Pro" pitchFamily="34" charset="-122"/>
+                <a:cs typeface="Be Vietnam Pro" pitchFamily="34" charset="-120"/>
+              </a:rPr>
+              <a:t> ngân</a:t>
             </a:r>
             <a:r>
               <a:rPr lang="en-US" sz="2100" b="1" dirty="0" spc="-3" kern="0">
@@ -5953,40 +6096,7 @@
                 <a:ea typeface="Be Vietnam Pro" pitchFamily="34" charset="-122"/>
                 <a:cs typeface="Be Vietnam Pro" pitchFamily="34" charset="-120"/>
               </a:rPr>
-              <a:t> khi</a:t>
-            </a:r>
-            <a:r>
-              <a:rPr lang="en-US" sz="2100" b="1" dirty="0" spc="-16" kern="0">
-                <a:solidFill>
-                  <a:srgbClr val="F3EEE3"/>
-                </a:solidFill>
-                <a:latin typeface="Be Vietnam Pro" pitchFamily="34" charset="0"/>
-                <a:ea typeface="Be Vietnam Pro" pitchFamily="34" charset="-122"/>
-                <a:cs typeface="Be Vietnam Pro" pitchFamily="34" charset="-120"/>
-              </a:rPr>
-              <a:t> quyết</a:t>
-            </a:r>
-            <a:r>
-              <a:rPr lang="en-US" sz="2100" b="1" dirty="0" spc="-4" kern="0">
-                <a:solidFill>
-                  <a:srgbClr val="F3EEE3"/>
-                </a:solidFill>
-                <a:latin typeface="Be Vietnam Pro" pitchFamily="34" charset="0"/>
-                <a:ea typeface="Be Vietnam Pro" pitchFamily="34" charset="-122"/>
-                <a:cs typeface="Be Vietnam Pro" pitchFamily="34" charset="-120"/>
-              </a:rPr>
-              <a:t> toán,</a:t>
-            </a:r>
-            <a:r>
-              <a:rPr lang="en-US" sz="2100" b="1" dirty="0" spc="-8" kern="0">
-                <a:solidFill>
-                  <a:srgbClr val="F3EEE3"/>
-                </a:solidFill>
-                <a:latin typeface="Be Vietnam Pro" pitchFamily="34" charset="0"/>
-                <a:ea typeface="Be Vietnam Pro" pitchFamily="34" charset="-122"/>
-                <a:cs typeface="Be Vietnam Pro" pitchFamily="34" charset="-120"/>
-              </a:rPr>
-              <a:t> không theo</a:t>
+              <a:t> hàng</a:t>
             </a:r>
             <a:r>
               <a:rPr lang="en-US" sz="2100" b="1" dirty="0" spc="-2" kern="0">
@@ -5997,29 +6107,7 @@
                 <a:ea typeface="Be Vietnam Pro" pitchFamily="34" charset="-122"/>
                 <a:cs typeface="Be Vietnam Pro" pitchFamily="34" charset="-120"/>
               </a:rPr>
-              <a:t> thời</a:t>
-            </a:r>
-            <a:r>
-              <a:rPr lang="en-US" sz="2100" b="1" dirty="0" spc="-1" kern="0">
-                <a:solidFill>
-                  <a:srgbClr val="F3EEE3"/>
-                </a:solidFill>
-                <a:latin typeface="Be Vietnam Pro" pitchFamily="34" charset="0"/>
-                <a:ea typeface="Be Vietnam Pro" pitchFamily="34" charset="-122"/>
-                <a:cs typeface="Be Vietnam Pro" pitchFamily="34" charset="-120"/>
-              </a:rPr>
-              <a:t> gian</a:t>
-            </a:r>
-            <a:r>
-              <a:rPr lang="en-US" sz="2100" b="1" dirty="0" spc="6" kern="0">
-                <a:solidFill>
-                  <a:srgbClr val="F3EEE3"/>
-                </a:solidFill>
-                <a:latin typeface="Be Vietnam Pro" pitchFamily="34" charset="0"/>
-                <a:ea typeface="Be Vietnam Pro" pitchFamily="34" charset="-122"/>
-                <a:cs typeface="Be Vietnam Pro" pitchFamily="34" charset="-120"/>
-              </a:rPr>
-              <a:t> thực.</a:t>
+              <a:t> thu.</a:t>
             </a:r>
             <a:endParaRPr lang="en-US" sz="2100" dirty="0"/>
           </a:p>
